--- a/documentos/AI_PROJ2_APRESENTAÇÃO.pptx
+++ b/documentos/AI_PROJ2_APRESENTAÇÃO.pptx
@@ -248,7 +248,7 @@
           <a:p>
             <a:fld id="{632132BA-7F90-C045-AC3C-D088D737BC85}" type="datetimeFigureOut">
               <a:rPr lang="en-US" smtClean="0"/>
-              <a:t>4/23/26</a:t>
+              <a:t>4/29/26</a:t>
             </a:fld>
             <a:endParaRPr lang="en-US"/>
           </a:p>
@@ -314,7 +314,7 @@
           <a:p>
             <a:fld id="{286F13E1-8011-274F-A832-B81829A48DC4}" type="slidenum">
               <a:rPr lang="en-US" smtClean="0"/>
-              <a:t>‹#›</a:t>
+              <a:t>‹nº›</a:t>
             </a:fld>
             <a:endParaRPr lang="en-US"/>
           </a:p>
@@ -414,7 +414,7 @@
           <a:p>
             <a:fld id="{D724605C-FF3E-654F-890C-85C3E6C4269C}" type="datetimeFigureOut">
               <a:rPr lang="en-US" smtClean="0"/>
-              <a:t>4/23/26</a:t>
+              <a:t>4/29/26</a:t>
             </a:fld>
             <a:endParaRPr lang="en-US"/>
           </a:p>
@@ -573,7 +573,7 @@
           <a:p>
             <a:fld id="{DADA452D-C759-EA45-A61C-6757CDAD729D}" type="slidenum">
               <a:rPr lang="en-US" smtClean="0"/>
-              <a:t>‹#›</a:t>
+              <a:t>‹nº›</a:t>
             </a:fld>
             <a:endParaRPr lang="en-US"/>
           </a:p>
@@ -1033,7 +1033,7 @@
           <a:p>
             <a:fld id="{11E87A6F-16E5-2444-8E01-52483A43058D}" type="datetime1">
               <a:rPr lang="en-US" smtClean="0"/>
-              <a:t>4/23/26</a:t>
+              <a:t>4/29/26</a:t>
             </a:fld>
             <a:endParaRPr lang="en-US"/>
           </a:p>
@@ -1089,7 +1089,7 @@
           <a:p>
             <a:fld id="{DACF91DC-9B2A-DA46-8614-FC490D3FF29A}" type="slidenum">
               <a:rPr lang="en-US" smtClean="0"/>
-              <a:t>‹#›</a:t>
+              <a:t>‹nº›</a:t>
             </a:fld>
             <a:endParaRPr lang="en-US"/>
           </a:p>
@@ -1363,7 +1363,7 @@
           <a:p>
             <a:fld id="{30C8DD4D-0F64-554F-821E-A588CA7F0791}" type="datetime1">
               <a:rPr lang="en-US" smtClean="0"/>
-              <a:t>4/23/26</a:t>
+              <a:t>4/29/26</a:t>
             </a:fld>
             <a:endParaRPr lang="en-US"/>
           </a:p>
@@ -1409,7 +1409,7 @@
           <a:p>
             <a:fld id="{DACF91DC-9B2A-DA46-8614-FC490D3FF29A}" type="slidenum">
               <a:rPr lang="en-US" smtClean="0"/>
-              <a:t>‹#›</a:t>
+              <a:t>‹nº›</a:t>
             </a:fld>
             <a:endParaRPr lang="en-US"/>
           </a:p>
@@ -1537,7 +1537,7 @@
           <a:p>
             <a:fld id="{B933654A-3E1B-1642-984F-D85157AAB59A}" type="datetime1">
               <a:rPr lang="en-US" smtClean="0"/>
-              <a:t>4/23/26</a:t>
+              <a:t>4/29/26</a:t>
             </a:fld>
             <a:endParaRPr lang="en-US"/>
           </a:p>
@@ -1583,7 +1583,7 @@
           <a:p>
             <a:fld id="{DACF91DC-9B2A-DA46-8614-FC490D3FF29A}" type="slidenum">
               <a:rPr lang="en-US" smtClean="0"/>
-              <a:t>‹#›</a:t>
+              <a:t>‹nº›</a:t>
             </a:fld>
             <a:endParaRPr lang="en-US"/>
           </a:p>
@@ -1721,7 +1721,7 @@
           <a:p>
             <a:fld id="{B0A649C1-9FF8-D641-9274-7E16A33349D5}" type="datetime1">
               <a:rPr lang="en-US" smtClean="0"/>
-              <a:t>4/23/26</a:t>
+              <a:t>4/29/26</a:t>
             </a:fld>
             <a:endParaRPr lang="en-US"/>
           </a:p>
@@ -1767,7 +1767,7 @@
           <a:p>
             <a:fld id="{DACF91DC-9B2A-DA46-8614-FC490D3FF29A}" type="slidenum">
               <a:rPr lang="en-US" smtClean="0"/>
-              <a:t>‹#›</a:t>
+              <a:t>‹nº›</a:t>
             </a:fld>
             <a:endParaRPr lang="en-US"/>
           </a:p>
@@ -2522,7 +2522,7 @@
           <a:p>
             <a:fld id="{646ABE37-C354-7843-8D1B-82AD8732054D}" type="datetime1">
               <a:rPr lang="en-US" smtClean="0"/>
-              <a:t>4/23/26</a:t>
+              <a:t>4/29/26</a:t>
             </a:fld>
             <a:endParaRPr lang="en-US"/>
           </a:p>
@@ -2567,7 +2567,7 @@
           <a:p>
             <a:fld id="{DACF91DC-9B2A-DA46-8614-FC490D3FF29A}" type="slidenum">
               <a:rPr lang="en-US" smtClean="0"/>
-              <a:t>‹#›</a:t>
+              <a:t>‹nº›</a:t>
             </a:fld>
             <a:endParaRPr lang="en-US"/>
           </a:p>
@@ -2757,7 +2757,7 @@
           <a:p>
             <a:fld id="{BB2C8EF8-12EF-244B-8AD9-ADF3AF7DF6B1}" type="datetime1">
               <a:rPr lang="en-US" smtClean="0"/>
-              <a:t>4/23/26</a:t>
+              <a:t>4/29/26</a:t>
             </a:fld>
             <a:endParaRPr lang="en-US"/>
           </a:p>
@@ -2780,7 +2780,7 @@
           <a:p>
             <a:fld id="{DACF91DC-9B2A-DA46-8614-FC490D3FF29A}" type="slidenum">
               <a:rPr lang="en-US" smtClean="0"/>
-              <a:t>‹#›</a:t>
+              <a:t>‹nº›</a:t>
             </a:fld>
             <a:endParaRPr lang="en-US"/>
           </a:p>
@@ -3018,7 +3018,7 @@
           <a:p>
             <a:fld id="{3CADE1FB-A965-7646-B21B-EA92A716BFB6}" type="datetime1">
               <a:rPr lang="en-US" smtClean="0"/>
-              <a:t>4/23/26</a:t>
+              <a:t>4/29/26</a:t>
             </a:fld>
             <a:endParaRPr lang="en-US"/>
           </a:p>
@@ -3064,7 +3064,7 @@
           <a:p>
             <a:fld id="{DACF91DC-9B2A-DA46-8614-FC490D3FF29A}" type="slidenum">
               <a:rPr lang="en-US" smtClean="0"/>
-              <a:t>‹#›</a:t>
+              <a:t>‹nº›</a:t>
             </a:fld>
             <a:endParaRPr lang="en-US"/>
           </a:p>
@@ -3310,7 +3310,7 @@
           <a:p>
             <a:fld id="{890562DD-2E3D-1046-8925-14B387B4EBE4}" type="datetime1">
               <a:rPr lang="en-US" smtClean="0"/>
-              <a:t>4/23/26</a:t>
+              <a:t>4/29/26</a:t>
             </a:fld>
             <a:endParaRPr lang="en-US"/>
           </a:p>
@@ -3356,7 +3356,7 @@
           <a:p>
             <a:fld id="{DACF91DC-9B2A-DA46-8614-FC490D3FF29A}" type="slidenum">
               <a:rPr lang="en-US" smtClean="0"/>
-              <a:t>‹#›</a:t>
+              <a:t>‹nº›</a:t>
             </a:fld>
             <a:endParaRPr lang="en-US"/>
           </a:p>
@@ -3736,7 +3736,7 @@
           <a:p>
             <a:fld id="{996B5E3E-DB9A-D44E-A77E-F04CA3810003}" type="datetime1">
               <a:rPr lang="en-US" smtClean="0"/>
-              <a:t>4/23/26</a:t>
+              <a:t>4/29/26</a:t>
             </a:fld>
             <a:endParaRPr lang="en-US"/>
           </a:p>
@@ -3782,7 +3782,7 @@
           <a:p>
             <a:fld id="{DACF91DC-9B2A-DA46-8614-FC490D3FF29A}" type="slidenum">
               <a:rPr lang="en-US" smtClean="0"/>
-              <a:t>‹#›</a:t>
+              <a:t>‹nº›</a:t>
             </a:fld>
             <a:endParaRPr lang="en-US"/>
           </a:p>
@@ -3882,7 +3882,7 @@
           <a:p>
             <a:fld id="{3ED3CC3B-8D39-4F4D-BF99-FB2D3A1E3AF3}" type="datetime1">
               <a:rPr lang="en-US" smtClean="0"/>
-              <a:t>4/23/26</a:t>
+              <a:t>4/29/26</a:t>
             </a:fld>
             <a:endParaRPr lang="en-US"/>
           </a:p>
@@ -3976,7 +3976,7 @@
           <a:p>
             <a:fld id="{DACF91DC-9B2A-DA46-8614-FC490D3FF29A}" type="slidenum">
               <a:rPr lang="en-US" smtClean="0"/>
-              <a:t>‹#›</a:t>
+              <a:t>‹nº›</a:t>
             </a:fld>
             <a:endParaRPr lang="en-US"/>
           </a:p>
@@ -4029,7 +4029,7 @@
           <a:p>
             <a:fld id="{3E4A6A1B-DA9C-F04B-AB4D-14C78B78D751}" type="datetime1">
               <a:rPr lang="en-US" smtClean="0"/>
-              <a:t>4/23/26</a:t>
+              <a:t>4/29/26</a:t>
             </a:fld>
             <a:endParaRPr lang="en-US"/>
           </a:p>
@@ -4075,7 +4075,7 @@
           <a:p>
             <a:fld id="{DACF91DC-9B2A-DA46-8614-FC490D3FF29A}" type="slidenum">
               <a:rPr lang="en-US" smtClean="0"/>
-              <a:t>‹#›</a:t>
+              <a:t>‹nº›</a:t>
             </a:fld>
             <a:endParaRPr lang="en-US"/>
           </a:p>
@@ -4310,7 +4310,7 @@
           <a:p>
             <a:fld id="{2E7ACD2A-FE21-F941-9181-60477F37902D}" type="datetime1">
               <a:rPr lang="en-US" smtClean="0"/>
-              <a:t>4/23/26</a:t>
+              <a:t>4/29/26</a:t>
             </a:fld>
             <a:endParaRPr lang="en-US"/>
           </a:p>
@@ -4356,7 +4356,7 @@
           <a:p>
             <a:fld id="{DACF91DC-9B2A-DA46-8614-FC490D3FF29A}" type="slidenum">
               <a:rPr lang="en-US" smtClean="0"/>
-              <a:t>‹#›</a:t>
+              <a:t>‹nº›</a:t>
             </a:fld>
             <a:endParaRPr lang="en-US"/>
           </a:p>
@@ -4530,7 +4530,7 @@
           <a:p>
             <a:fld id="{3EAAA085-F8B6-C74F-A545-7650ED705A4F}" type="datetime1">
               <a:rPr lang="en-US" smtClean="0"/>
-              <a:t>4/23/26</a:t>
+              <a:t>4/29/26</a:t>
             </a:fld>
             <a:endParaRPr lang="en-US"/>
           </a:p>
@@ -4612,7 +4612,7 @@
           <a:p>
             <a:fld id="{DACF91DC-9B2A-DA46-8614-FC490D3FF29A}" type="slidenum">
               <a:rPr lang="en-US" smtClean="0"/>
-              <a:t>‹#›</a:t>
+              <a:t>‹nº›</a:t>
             </a:fld>
             <a:endParaRPr lang="en-US"/>
           </a:p>
@@ -4965,21 +4965,16 @@
           <a:lstStyle/>
           <a:p>
             <a:r>
-              <a:rPr lang="en-US" dirty="0" err="1"/>
-              <a:t>projet</a:t>
-            </a:r>
-            <a:r>
-              <a:rPr lang="en-US" dirty="0"/>
-              <a:t> 2</a:t>
+              <a:rPr lang="en-US" noProof="0" dirty="0"/>
+              <a:t>Project 2</a:t>
             </a:r>
             <a:br>
-              <a:rPr lang="en-US" dirty="0"/>
+              <a:rPr lang="en-US" noProof="0" dirty="0"/>
             </a:br>
             <a:r>
-              <a:rPr lang="en-US" dirty="0"/>
+              <a:rPr lang="en-US" noProof="0" dirty="0"/>
               <a:t>L.EIC – IART</a:t>
             </a:r>
-            <a:endParaRPr lang="pt-PT" dirty="0"/>
           </a:p>
         </p:txBody>
       </p:sp>
@@ -4999,15 +4994,37 @@
             <p:ph type="subTitle" idx="1"/>
           </p:nvPr>
         </p:nvSpPr>
-        <p:spPr/>
-        <p:txBody>
-          <a:bodyPr/>
-          <a:lstStyle/>
-          <a:p>
-            <a:r>
-              <a:rPr lang="en-PT" dirty="0"/>
-              <a:t>student names and numbers</a:t>
-            </a:r>
+        <p:spPr>
+          <a:xfrm>
+            <a:off x="1371600" y="3183545"/>
+            <a:ext cx="6400800" cy="1752600"/>
+          </a:xfrm>
+        </p:spPr>
+        <p:txBody>
+          <a:bodyPr>
+            <a:normAutofit/>
+          </a:bodyPr>
+          <a:lstStyle/>
+          <a:p>
+            <a:r>
+              <a:rPr lang="en-US" noProof="0" dirty="0"/>
+              <a:t>Afonso Pereira – 202305652</a:t>
+            </a:r>
+          </a:p>
+          <a:p>
+            <a:r>
+              <a:rPr lang="en-US" noProof="0" dirty="0"/>
+              <a:t>Paulo Saavedra – 202307477</a:t>
+            </a:r>
+          </a:p>
+          <a:p>
+            <a:r>
+              <a:rPr lang="en-US" noProof="0" dirty="0"/>
+              <a:t>Tiago Afonseca – 202303700</a:t>
+            </a:r>
+          </a:p>
+          <a:p>
+            <a:endParaRPr lang="en-US" noProof="0" dirty="0"/>
           </a:p>
         </p:txBody>
       </p:sp>
@@ -5065,7 +5082,7 @@
           <a:lstStyle/>
           <a:p>
             <a:r>
-              <a:rPr lang="en-PT" dirty="0"/>
+              <a:rPr lang="en-US" noProof="0" dirty="0"/>
               <a:t>expected challenges during development and deployment</a:t>
             </a:r>
           </a:p>
@@ -5093,27 +5110,27 @@
           <a:lstStyle/>
           <a:p>
             <a:r>
-              <a:rPr lang="en-PT" dirty="0"/>
+              <a:rPr lang="en-US" noProof="0" dirty="0"/>
               <a:t>technical </a:t>
             </a:r>
           </a:p>
           <a:p>
             <a:pPr lvl="1"/>
             <a:r>
-              <a:rPr lang="en-PT" dirty="0"/>
+              <a:rPr lang="en-US" noProof="0" dirty="0"/>
               <a:t>e.g. lack of reliable data</a:t>
             </a:r>
           </a:p>
           <a:p>
             <a:r>
-              <a:rPr lang="en-PT" dirty="0"/>
+              <a:rPr lang="en-US" noProof="0" dirty="0"/>
               <a:t>organizational</a:t>
             </a:r>
           </a:p>
           <a:p>
             <a:pPr lvl="1"/>
             <a:r>
-              <a:rPr lang="en-PT" dirty="0"/>
+              <a:rPr lang="en-US" noProof="0" dirty="0"/>
               <a:t>e.g. opposition of users</a:t>
             </a:r>
           </a:p>
@@ -5141,10 +5158,10 @@
           <a:lstStyle/>
           <a:p>
             <a:fld id="{DACF91DC-9B2A-DA46-8614-FC490D3FF29A}" type="slidenum">
-              <a:rPr lang="en-US" smtClean="0"/>
+              <a:rPr lang="en-US" noProof="0" smtClean="0"/>
               <a:t>10</a:t>
             </a:fld>
-            <a:endParaRPr lang="en-US"/>
+            <a:endParaRPr lang="en-US" noProof="0" dirty="0"/>
           </a:p>
         </p:txBody>
       </p:sp>
@@ -5170,10 +5187,9 @@
           <a:lstStyle/>
           <a:p>
             <a:r>
-              <a:rPr lang="en-US"/>
+              <a:rPr lang="en-US" noProof="0" dirty="0"/>
               <a:t>IART @ L.EIC</a:t>
             </a:r>
-            <a:endParaRPr lang="en-US" dirty="0"/>
           </a:p>
         </p:txBody>
       </p:sp>
@@ -5231,7 +5247,7 @@
           <a:lstStyle/>
           <a:p>
             <a:r>
-              <a:rPr lang="en-PT" dirty="0"/>
+              <a:rPr lang="en-US" noProof="0" dirty="0"/>
               <a:t>unavailable data</a:t>
             </a:r>
           </a:p>
@@ -5259,13 +5275,13 @@
           <a:lstStyle/>
           <a:p>
             <a:r>
-              <a:rPr lang="en-PT" dirty="0"/>
+              <a:rPr lang="en-US" noProof="0" dirty="0"/>
               <a:t>high-level description of additional data that should be available</a:t>
             </a:r>
           </a:p>
           <a:p>
             <a:r>
-              <a:rPr lang="en-PT" dirty="0"/>
+              <a:rPr lang="en-US" noProof="0" dirty="0"/>
               <a:t>challenges involved in collecting it</a:t>
             </a:r>
           </a:p>
@@ -5293,10 +5309,10 @@
           <a:lstStyle/>
           <a:p>
             <a:fld id="{DACF91DC-9B2A-DA46-8614-FC490D3FF29A}" type="slidenum">
-              <a:rPr lang="en-US" smtClean="0"/>
+              <a:rPr lang="en-US" noProof="0" smtClean="0"/>
               <a:t>11</a:t>
             </a:fld>
-            <a:endParaRPr lang="en-US"/>
+            <a:endParaRPr lang="en-US" noProof="0" dirty="0"/>
           </a:p>
         </p:txBody>
       </p:sp>
@@ -5322,10 +5338,9 @@
           <a:lstStyle/>
           <a:p>
             <a:r>
-              <a:rPr lang="en-US"/>
+              <a:rPr lang="en-US" noProof="0" dirty="0"/>
               <a:t>IART @ L.EIC</a:t>
             </a:r>
-            <a:endParaRPr lang="en-US" dirty="0"/>
           </a:p>
         </p:txBody>
       </p:sp>
@@ -5381,7 +5396,7 @@
           <a:lstStyle/>
           <a:p>
             <a:r>
-              <a:rPr lang="en-PT" dirty="0"/>
+              <a:rPr lang="en-US" noProof="0" dirty="0"/>
               <a:t>ethical risks</a:t>
             </a:r>
           </a:p>
@@ -5409,7 +5424,7 @@
           <a:lstStyle/>
           <a:p>
             <a:r>
-              <a:rPr lang="en-PT" dirty="0"/>
+              <a:rPr lang="en-US" noProof="0" dirty="0"/>
               <a:t>what are the ethical risks involved in using the proposed solution</a:t>
             </a:r>
           </a:p>
@@ -5437,10 +5452,10 @@
           <a:lstStyle/>
           <a:p>
             <a:fld id="{DACF91DC-9B2A-DA46-8614-FC490D3FF29A}" type="slidenum">
-              <a:rPr lang="en-US" smtClean="0"/>
+              <a:rPr lang="en-US" noProof="0" smtClean="0"/>
               <a:t>12</a:t>
             </a:fld>
-            <a:endParaRPr lang="en-US"/>
+            <a:endParaRPr lang="en-US" noProof="0" dirty="0"/>
           </a:p>
         </p:txBody>
       </p:sp>
@@ -5466,10 +5481,9 @@
           <a:lstStyle/>
           <a:p>
             <a:r>
-              <a:rPr lang="en-US"/>
+              <a:rPr lang="en-US" noProof="0" dirty="0"/>
               <a:t>IART @ L.EIC</a:t>
             </a:r>
-            <a:endParaRPr lang="en-US" dirty="0"/>
           </a:p>
         </p:txBody>
       </p:sp>
@@ -5525,8 +5539,8 @@
           <a:lstStyle/>
           <a:p>
             <a:r>
-              <a:rPr lang="en-PT" dirty="0"/>
-              <a:t>customer</a:t>
+              <a:rPr lang="en-US" noProof="0" dirty="0"/>
+              <a:t>Medical Clinic</a:t>
             </a:r>
           </a:p>
         </p:txBody>
@@ -5549,18 +5563,96 @@
         </p:nvSpPr>
         <p:spPr/>
         <p:txBody>
-          <a:bodyPr/>
-          <a:lstStyle/>
-          <a:p>
-            <a:r>
-              <a:rPr lang="en-PT" dirty="0"/>
-              <a:t>name and short description of the customer</a:t>
-            </a:r>
-          </a:p>
-          <a:p>
-            <a:r>
-              <a:rPr lang="en-PT" dirty="0"/>
-              <a:t>name and role of the contact person</a:t>
+          <a:bodyPr>
+            <a:normAutofit/>
+          </a:bodyPr>
+          <a:lstStyle/>
+          <a:p>
+            <a:r>
+              <a:rPr lang="en-US" sz="2000" b="0" i="0" u="none" strike="noStrike" noProof="0" dirty="0">
+                <a:solidFill>
+                  <a:srgbClr val="000000"/>
+                </a:solidFill>
+                <a:effectLst/>
+                <a:latin typeface="-webkit-standard"/>
+              </a:rPr>
+              <a:t>A medium-sized private medical clinic offering consultations in multiple specialties (General Practice, Pediatrics, Cardiology, Dermatology, and Orthopedics). It handles a high volume of daily consultations but faces challenges in optimizing staff workload.</a:t>
+            </a:r>
+          </a:p>
+          <a:p>
+            <a:endParaRPr lang="en-US" sz="2000" noProof="0" dirty="0">
+              <a:solidFill>
+                <a:srgbClr val="000000"/>
+              </a:solidFill>
+              <a:latin typeface="-webkit-standard"/>
+            </a:endParaRPr>
+          </a:p>
+          <a:p>
+            <a:endParaRPr lang="en-US" sz="2000" noProof="0" dirty="0">
+              <a:solidFill>
+                <a:srgbClr val="000000"/>
+              </a:solidFill>
+              <a:latin typeface="-webkit-standard"/>
+            </a:endParaRPr>
+          </a:p>
+          <a:p>
+            <a:pPr marL="0" indent="0">
+              <a:buNone/>
+            </a:pPr>
+            <a:endParaRPr lang="en-US" sz="2000" noProof="0" dirty="0">
+              <a:solidFill>
+                <a:srgbClr val="000000"/>
+              </a:solidFill>
+              <a:latin typeface="-webkit-standard"/>
+            </a:endParaRPr>
+          </a:p>
+          <a:p>
+            <a:r>
+              <a:rPr lang="en-US" sz="2000" b="1" i="0" u="none" strike="noStrike" noProof="0" dirty="0">
+                <a:solidFill>
+                  <a:srgbClr val="000000"/>
+                </a:solidFill>
+                <a:effectLst/>
+              </a:rPr>
+              <a:t>Contact Person:</a:t>
+            </a:r>
+            <a:r>
+              <a:rPr lang="en-US" sz="2000" b="0" i="0" u="none" strike="noStrike" noProof="0" dirty="0">
+                <a:solidFill>
+                  <a:srgbClr val="000000"/>
+                </a:solidFill>
+                <a:effectLst/>
+                <a:latin typeface="-webkit-standard"/>
+              </a:rPr>
+              <a:t> Emily Carter</a:t>
+            </a:r>
+            <a:endParaRPr lang="en-US" sz="3600" b="0" i="0" u="none" strike="noStrike" noProof="0" dirty="0">
+              <a:solidFill>
+                <a:srgbClr val="000000"/>
+              </a:solidFill>
+              <a:effectLst/>
+              <a:latin typeface="-webkit-standard"/>
+            </a:endParaRPr>
+          </a:p>
+          <a:p>
+            <a:r>
+              <a:rPr lang="en-US" sz="2000" b="1" i="0" u="none" strike="noStrike" noProof="0" dirty="0">
+                <a:solidFill>
+                  <a:srgbClr val="000000"/>
+                </a:solidFill>
+                <a:effectLst/>
+              </a:rPr>
+              <a:t>Position: </a:t>
+            </a:r>
+            <a:r>
+              <a:rPr lang="en-US" sz="2000" b="0" i="0" u="none" strike="noStrike" noProof="0" dirty="0">
+                <a:solidFill>
+                  <a:srgbClr val="000000"/>
+                </a:solidFill>
+                <a:effectLst/>
+                <a:latin typeface="-webkit-standard"/>
+              </a:rPr>
+              <a:t>Operations Manager</a:t>
             </a:r>
           </a:p>
         </p:txBody>
@@ -5587,10 +5679,10 @@
           <a:lstStyle/>
           <a:p>
             <a:fld id="{DACF91DC-9B2A-DA46-8614-FC490D3FF29A}" type="slidenum">
-              <a:rPr lang="en-US" smtClean="0"/>
+              <a:rPr lang="en-US" noProof="0" smtClean="0"/>
               <a:t>2</a:t>
             </a:fld>
-            <a:endParaRPr lang="en-US"/>
+            <a:endParaRPr lang="en-US" noProof="0" dirty="0"/>
           </a:p>
         </p:txBody>
       </p:sp>
@@ -5616,10 +5708,9 @@
           <a:lstStyle/>
           <a:p>
             <a:r>
-              <a:rPr lang="en-US"/>
+              <a:rPr lang="en-US" noProof="0" dirty="0"/>
               <a:t>IART @ L.EIC</a:t>
             </a:r>
-            <a:endParaRPr lang="en-US" dirty="0"/>
           </a:p>
         </p:txBody>
       </p:sp>
@@ -5675,7 +5766,7 @@
           <a:lstStyle/>
           <a:p>
             <a:r>
-              <a:rPr lang="en-PT" dirty="0"/>
+              <a:rPr lang="en-US" noProof="0" dirty="0"/>
               <a:t>problem</a:t>
             </a:r>
           </a:p>
@@ -5699,19 +5790,97 @@
         </p:nvSpPr>
         <p:spPr/>
         <p:txBody>
-          <a:bodyPr/>
-          <a:lstStyle/>
-          <a:p>
-            <a:r>
-              <a:rPr lang="en-PT" dirty="0"/>
-              <a:t>definition of the problem</a:t>
-            </a:r>
-          </a:p>
-          <a:p>
-            <a:r>
-              <a:rPr lang="en-PT" dirty="0"/>
-              <a:t>short description of the current approach to address it</a:t>
-            </a:r>
+          <a:bodyPr>
+            <a:normAutofit/>
+          </a:bodyPr>
+          <a:lstStyle/>
+          <a:p>
+            <a:pPr marL="0" indent="0">
+              <a:buNone/>
+            </a:pPr>
+            <a:r>
+              <a:rPr lang="en-US" sz="1800" b="1" i="0" u="none" strike="noStrike" noProof="0" dirty="0">
+                <a:solidFill>
+                  <a:srgbClr val="000000"/>
+                </a:solidFill>
+                <a:effectLst/>
+              </a:rPr>
+              <a:t>Definition of the Problem:</a:t>
+            </a:r>
+            <a:br>
+              <a:rPr lang="en-US" sz="1800" noProof="0" dirty="0"/>
+            </a:br>
+            <a:r>
+              <a:rPr lang="en-US" sz="1600" b="0" i="0" u="none" strike="noStrike" dirty="0">
+                <a:solidFill>
+                  <a:srgbClr val="000000"/>
+                </a:solidFill>
+                <a:effectLst/>
+                <a:latin typeface="-webkit-standard"/>
+              </a:rPr>
+              <a:t>The clinic faces high no-show rates, resulting in direct revenue loss from unfilled appointment slots. This also creates unpredictable idle time for clinicians and contributes to longer waiting lists, ultimately reducing access and efficiency across the system.</a:t>
+            </a:r>
+          </a:p>
+          <a:p>
+            <a:pPr marL="0" indent="0">
+              <a:buNone/>
+            </a:pPr>
+            <a:endParaRPr lang="en-US" sz="1600" noProof="0" dirty="0">
+              <a:solidFill>
+                <a:srgbClr val="000000"/>
+              </a:solidFill>
+              <a:latin typeface="-webkit-standard"/>
+            </a:endParaRPr>
+          </a:p>
+          <a:p>
+            <a:pPr marL="0" indent="0">
+              <a:buNone/>
+            </a:pPr>
+            <a:endParaRPr lang="en-US" sz="1600" dirty="0">
+              <a:solidFill>
+                <a:srgbClr val="000000"/>
+              </a:solidFill>
+              <a:latin typeface="-webkit-standard"/>
+            </a:endParaRPr>
+          </a:p>
+          <a:p>
+            <a:pPr marL="0" indent="0">
+              <a:buNone/>
+            </a:pPr>
+            <a:endParaRPr lang="en-US" sz="1600" noProof="0" dirty="0">
+              <a:solidFill>
+                <a:srgbClr val="000000"/>
+              </a:solidFill>
+              <a:latin typeface="-webkit-standard"/>
+            </a:endParaRPr>
+          </a:p>
+          <a:p>
+            <a:pPr marL="0" indent="0">
+              <a:buNone/>
+            </a:pPr>
+            <a:r>
+              <a:rPr lang="en-US" sz="1600" b="1" i="0" u="none" strike="noStrike" noProof="0" dirty="0">
+                <a:solidFill>
+                  <a:srgbClr val="000000"/>
+                </a:solidFill>
+                <a:effectLst/>
+              </a:rPr>
+              <a:t>Current Approach</a:t>
+            </a:r>
+            <a:br>
+              <a:rPr lang="en-US" sz="1600" noProof="0" dirty="0"/>
+            </a:br>
+            <a:r>
+              <a:rPr lang="en-US" sz="1600" b="0" i="0" u="none" strike="noStrike" noProof="0" dirty="0">
+                <a:solidFill>
+                  <a:srgbClr val="000000"/>
+                </a:solidFill>
+                <a:effectLst/>
+                <a:latin typeface="-webkit-standard"/>
+              </a:rPr>
+              <a:t>The current approach is reactive and inefficient, relying on generic SMS reminders sent to all patients the day before appointments, combined with occasional manual confirmation calls. This process is time-consuming, generates unnecessary costs, and lacks a targeted strategy to proactively manage patients with a higher likelihood of not attending.</a:t>
+            </a:r>
+            <a:endParaRPr lang="en-US" sz="2800" noProof="0" dirty="0"/>
           </a:p>
         </p:txBody>
       </p:sp>
@@ -5737,10 +5906,10 @@
           <a:lstStyle/>
           <a:p>
             <a:fld id="{DACF91DC-9B2A-DA46-8614-FC490D3FF29A}" type="slidenum">
-              <a:rPr lang="en-US" smtClean="0"/>
+              <a:rPr lang="en-US" noProof="0" smtClean="0"/>
               <a:t>3</a:t>
             </a:fld>
-            <a:endParaRPr lang="en-US"/>
+            <a:endParaRPr lang="en-US" noProof="0" dirty="0"/>
           </a:p>
         </p:txBody>
       </p:sp>
@@ -5766,10 +5935,9 @@
           <a:lstStyle/>
           <a:p>
             <a:r>
-              <a:rPr lang="en-US"/>
+              <a:rPr lang="en-US" noProof="0" dirty="0"/>
               <a:t>IART @ L.EIC</a:t>
             </a:r>
-            <a:endParaRPr lang="en-US" dirty="0"/>
           </a:p>
         </p:txBody>
       </p:sp>
@@ -5825,7 +5993,7 @@
           <a:lstStyle/>
           <a:p>
             <a:r>
-              <a:rPr lang="en-PT" dirty="0"/>
+              <a:rPr lang="en-US" noProof="0" dirty="0"/>
               <a:t>available data</a:t>
             </a:r>
           </a:p>
@@ -5853,14 +6021,14 @@
           <a:lstStyle/>
           <a:p>
             <a:r>
-              <a:rPr lang="en-PT" dirty="0"/>
+              <a:rPr lang="en-US" noProof="0" dirty="0"/>
               <a:t>high-level description of the data that would be available</a:t>
             </a:r>
           </a:p>
           <a:p>
             <a:pPr lvl="1"/>
             <a:r>
-              <a:rPr lang="en-PT" dirty="0"/>
+              <a:rPr lang="en-US" noProof="0" dirty="0"/>
               <a:t>e.g. entities or tables</a:t>
             </a:r>
           </a:p>
@@ -5888,10 +6056,10 @@
           <a:lstStyle/>
           <a:p>
             <a:fld id="{DACF91DC-9B2A-DA46-8614-FC490D3FF29A}" type="slidenum">
-              <a:rPr lang="en-US" smtClean="0"/>
+              <a:rPr lang="en-US" noProof="0" smtClean="0"/>
               <a:t>4</a:t>
             </a:fld>
-            <a:endParaRPr lang="en-US"/>
+            <a:endParaRPr lang="en-US" noProof="0" dirty="0"/>
           </a:p>
         </p:txBody>
       </p:sp>
@@ -5917,10 +6085,9 @@
           <a:lstStyle/>
           <a:p>
             <a:r>
-              <a:rPr lang="en-US"/>
+              <a:rPr lang="en-US" noProof="0" dirty="0"/>
               <a:t>IART @ L.EIC</a:t>
             </a:r>
-            <a:endParaRPr lang="en-US" dirty="0"/>
           </a:p>
         </p:txBody>
       </p:sp>
@@ -5976,7 +6143,7 @@
           <a:lstStyle/>
           <a:p>
             <a:r>
-              <a:rPr lang="en-PT" dirty="0"/>
+              <a:rPr lang="en-US" noProof="0" dirty="0"/>
               <a:t>solution overview</a:t>
             </a:r>
           </a:p>
@@ -6006,45 +6173,45 @@
           <a:lstStyle/>
           <a:p>
             <a:r>
-              <a:rPr lang="en-PT" dirty="0"/>
+              <a:rPr lang="en-US" noProof="0" dirty="0"/>
               <a:t>description of the solution designed to address the problem</a:t>
             </a:r>
           </a:p>
           <a:p>
             <a:pPr lvl="1"/>
             <a:r>
-              <a:rPr lang="en-PT" dirty="0"/>
+              <a:rPr lang="en-US" noProof="0" dirty="0"/>
               <a:t>probably including other components besides the ML model</a:t>
             </a:r>
           </a:p>
           <a:p>
             <a:pPr lvl="2"/>
             <a:r>
-              <a:rPr lang="en-PT" dirty="0"/>
+              <a:rPr lang="en-US" noProof="0" dirty="0"/>
               <a:t>… such as mobile apps, websites, hardware</a:t>
             </a:r>
           </a:p>
           <a:p>
             <a:pPr lvl="1"/>
             <a:r>
-              <a:rPr lang="en-PT" dirty="0"/>
+              <a:rPr lang="en-US" noProof="0" dirty="0"/>
               <a:t>… and other AI techniques</a:t>
             </a:r>
           </a:p>
           <a:p>
             <a:pPr lvl="2"/>
             <a:r>
-              <a:rPr lang="en-PT" dirty="0"/>
+              <a:rPr lang="en-US" noProof="0" dirty="0"/>
               <a:t>e.g. search</a:t>
             </a:r>
           </a:p>
           <a:p>
             <a:pPr lvl="1"/>
-            <a:endParaRPr lang="en-PT" dirty="0"/>
-          </a:p>
-          <a:p>
-            <a:r>
-              <a:rPr lang="en-PT" dirty="0">
+            <a:endParaRPr lang="en-US" noProof="0" dirty="0"/>
+          </a:p>
+          <a:p>
+            <a:r>
+              <a:rPr lang="en-US" noProof="0" dirty="0">
                 <a:solidFill>
                   <a:srgbClr val="FF0000"/>
                 </a:solidFill>
@@ -6052,13 +6219,13 @@
               <a:t>IMPORTANT NOTE: you are not expected to develop the whole application</a:t>
             </a:r>
             <a:r>
-              <a:rPr lang="en-PT" dirty="0"/>
+              <a:rPr lang="en-US" noProof="0" dirty="0"/>
               <a:t>. Just the predictive model.</a:t>
             </a:r>
           </a:p>
           <a:p>
             <a:pPr lvl="2"/>
-            <a:endParaRPr lang="en-PT" dirty="0"/>
+            <a:endParaRPr lang="en-US" noProof="0" dirty="0"/>
           </a:p>
         </p:txBody>
       </p:sp>
@@ -6084,10 +6251,10 @@
           <a:lstStyle/>
           <a:p>
             <a:fld id="{DACF91DC-9B2A-DA46-8614-FC490D3FF29A}" type="slidenum">
-              <a:rPr lang="en-US" smtClean="0"/>
+              <a:rPr lang="en-US" noProof="0" smtClean="0"/>
               <a:t>5</a:t>
             </a:fld>
-            <a:endParaRPr lang="en-US"/>
+            <a:endParaRPr lang="en-US" noProof="0" dirty="0"/>
           </a:p>
         </p:txBody>
       </p:sp>
@@ -6113,10 +6280,9 @@
           <a:lstStyle/>
           <a:p>
             <a:r>
-              <a:rPr lang="en-US"/>
+              <a:rPr lang="en-US" noProof="0" dirty="0"/>
               <a:t>IART @ L.EIC</a:t>
             </a:r>
-            <a:endParaRPr lang="en-US" dirty="0"/>
           </a:p>
         </p:txBody>
       </p:sp>
@@ -6172,7 +6338,7 @@
           <a:lstStyle/>
           <a:p>
             <a:r>
-              <a:rPr lang="en-PT" dirty="0"/>
+              <a:rPr lang="en-US" noProof="0" dirty="0"/>
               <a:t>predictive model</a:t>
             </a:r>
           </a:p>
@@ -6200,21 +6366,21 @@
           <a:lstStyle/>
           <a:p>
             <a:r>
-              <a:rPr lang="en-PT" dirty="0"/>
+              <a:rPr lang="en-US" noProof="0" dirty="0"/>
               <a:t>description of the model</a:t>
             </a:r>
           </a:p>
           <a:p>
             <a:pPr lvl="1"/>
             <a:r>
-              <a:rPr lang="en-PT" dirty="0"/>
+              <a:rPr lang="en-US" noProof="0" dirty="0"/>
               <a:t>i.e. target variable</a:t>
             </a:r>
           </a:p>
           <a:p>
             <a:pPr lvl="1"/>
             <a:r>
-              <a:rPr lang="en-PT" dirty="0"/>
+              <a:rPr lang="en-US" noProof="0" dirty="0"/>
               <a:t>attributes</a:t>
             </a:r>
           </a:p>
@@ -6242,10 +6408,10 @@
           <a:lstStyle/>
           <a:p>
             <a:fld id="{DACF91DC-9B2A-DA46-8614-FC490D3FF29A}" type="slidenum">
-              <a:rPr lang="en-US" smtClean="0"/>
+              <a:rPr lang="en-US" noProof="0" smtClean="0"/>
               <a:t>6</a:t>
             </a:fld>
-            <a:endParaRPr lang="en-US"/>
+            <a:endParaRPr lang="en-US" noProof="0" dirty="0"/>
           </a:p>
         </p:txBody>
       </p:sp>
@@ -6271,10 +6437,9 @@
           <a:lstStyle/>
           <a:p>
             <a:r>
-              <a:rPr lang="en-US"/>
+              <a:rPr lang="en-US" noProof="0" dirty="0"/>
               <a:t>IART @ L.EIC</a:t>
             </a:r>
-            <a:endParaRPr lang="en-US" dirty="0"/>
           </a:p>
         </p:txBody>
       </p:sp>
@@ -6330,7 +6495,7 @@
           <a:lstStyle/>
           <a:p>
             <a:r>
-              <a:rPr lang="en-PT" dirty="0"/>
+              <a:rPr lang="en-US" noProof="0" dirty="0"/>
               <a:t>empirical study: setup</a:t>
             </a:r>
           </a:p>
@@ -6358,35 +6523,35 @@
           <a:lstStyle/>
           <a:p>
             <a:r>
-              <a:rPr lang="en-PT" dirty="0"/>
+              <a:rPr lang="en-US" noProof="0" dirty="0"/>
               <a:t>summary of experimental setup</a:t>
             </a:r>
           </a:p>
           <a:p>
             <a:pPr lvl="1"/>
             <a:r>
-              <a:rPr lang="en-PT" dirty="0"/>
+              <a:rPr lang="en-US" noProof="0" dirty="0"/>
               <a:t>artificial data generated</a:t>
             </a:r>
           </a:p>
           <a:p>
             <a:pPr lvl="1"/>
             <a:r>
-              <a:rPr lang="en-PT" dirty="0"/>
+              <a:rPr lang="en-US" noProof="0" dirty="0"/>
               <a:t>model evaluation process</a:t>
             </a:r>
           </a:p>
           <a:p>
             <a:pPr lvl="2"/>
             <a:r>
-              <a:rPr lang="en-PT" dirty="0"/>
+              <a:rPr lang="en-US" noProof="0" dirty="0"/>
               <a:t>evaluation measures</a:t>
             </a:r>
           </a:p>
           <a:p>
             <a:pPr lvl="2"/>
             <a:r>
-              <a:rPr lang="en-PT" dirty="0"/>
+              <a:rPr lang="en-US" noProof="0" dirty="0"/>
               <a:t>performances estimation methodology</a:t>
             </a:r>
           </a:p>
@@ -6414,10 +6579,10 @@
           <a:lstStyle/>
           <a:p>
             <a:fld id="{DACF91DC-9B2A-DA46-8614-FC490D3FF29A}" type="slidenum">
-              <a:rPr lang="en-US" smtClean="0"/>
+              <a:rPr lang="en-US" noProof="0" smtClean="0"/>
               <a:t>7</a:t>
             </a:fld>
-            <a:endParaRPr lang="en-US"/>
+            <a:endParaRPr lang="en-US" noProof="0" dirty="0"/>
           </a:p>
         </p:txBody>
       </p:sp>
@@ -6443,10 +6608,9 @@
           <a:lstStyle/>
           <a:p>
             <a:r>
-              <a:rPr lang="en-US"/>
+              <a:rPr lang="en-US" noProof="0" dirty="0"/>
               <a:t>IART @ L.EIC</a:t>
             </a:r>
-            <a:endParaRPr lang="en-US" dirty="0"/>
           </a:p>
         </p:txBody>
       </p:sp>
@@ -6508,7 +6672,7 @@
           <a:lstStyle/>
           <a:p>
             <a:r>
-              <a:rPr lang="en-PT" dirty="0"/>
+              <a:rPr lang="en-US" noProof="0" dirty="0"/>
               <a:t>empirical study: results</a:t>
             </a:r>
           </a:p>
@@ -6536,7 +6700,7 @@
           <a:lstStyle/>
           <a:p>
             <a:r>
-              <a:rPr lang="en-PT" dirty="0"/>
+              <a:rPr lang="en-US" noProof="0" dirty="0"/>
               <a:t>e.g. 3 algorithms</a:t>
             </a:r>
           </a:p>
@@ -6564,10 +6728,10 @@
           <a:lstStyle/>
           <a:p>
             <a:fld id="{DACF91DC-9B2A-DA46-8614-FC490D3FF29A}" type="slidenum">
-              <a:rPr lang="en-US" smtClean="0"/>
+              <a:rPr lang="en-US" noProof="0" smtClean="0"/>
               <a:t>8</a:t>
             </a:fld>
-            <a:endParaRPr lang="en-US"/>
+            <a:endParaRPr lang="en-US" noProof="0" dirty="0"/>
           </a:p>
         </p:txBody>
       </p:sp>
@@ -6593,10 +6757,9 @@
           <a:lstStyle/>
           <a:p>
             <a:r>
-              <a:rPr lang="en-US"/>
+              <a:rPr lang="en-US" noProof="0" dirty="0"/>
               <a:t>IART @ L.EIC</a:t>
             </a:r>
-            <a:endParaRPr lang="en-US" dirty="0"/>
           </a:p>
         </p:txBody>
       </p:sp>
@@ -6652,7 +6815,7 @@
           <a:lstStyle/>
           <a:p>
             <a:r>
-              <a:rPr lang="en-PT" dirty="0"/>
+              <a:rPr lang="en-US" noProof="0" dirty="0"/>
               <a:t>stakeholders</a:t>
             </a:r>
           </a:p>
@@ -6680,7 +6843,7 @@
           <a:lstStyle/>
           <a:p>
             <a:r>
-              <a:rPr lang="en-PT" dirty="0"/>
+              <a:rPr lang="en-US" noProof="0" dirty="0"/>
               <a:t>list of roles in the organization that need to be involved for the successful development of the project</a:t>
             </a:r>
           </a:p>
@@ -6708,10 +6871,10 @@
           <a:lstStyle/>
           <a:p>
             <a:fld id="{DACF91DC-9B2A-DA46-8614-FC490D3FF29A}" type="slidenum">
-              <a:rPr lang="en-US" smtClean="0"/>
+              <a:rPr lang="en-US" noProof="0" smtClean="0"/>
               <a:t>9</a:t>
             </a:fld>
-            <a:endParaRPr lang="en-US"/>
+            <a:endParaRPr lang="en-US" noProof="0" dirty="0"/>
           </a:p>
         </p:txBody>
       </p:sp>
@@ -6737,10 +6900,9 @@
           <a:lstStyle/>
           <a:p>
             <a:r>
-              <a:rPr lang="en-US"/>
+              <a:rPr lang="en-US" noProof="0" dirty="0"/>
               <a:t>IART @ L.EIC</a:t>
             </a:r>
-            <a:endParaRPr lang="en-US" dirty="0"/>
           </a:p>
         </p:txBody>
       </p:sp>
